--- a/pptx/maio_2026/PORTOEXPRESS_LOGISTICA_LTDA.pptx
+++ b/pptx/maio_2026/PORTOEXPRESS_LOGISTICA_LTDA.pptx
@@ -147,10 +147,10 @@
               <c:strCache>
                 <c:ptCount val="2"/>
                 <c:pt idx="0">
-                  <c:v>Maio 2026</c:v>
+                  <c:v>Abril 2026</c:v>
                 </c:pt>
                 <c:pt idx="1">
-                  <c:v>Abril 2026</c:v>
+                  <c:v>Maio 2026</c:v>
                 </c:pt>
               </c:strCache>
             </c:strRef>
@@ -161,11 +161,12 @@
               <c:numCache>
                 <c:formatCode>General</c:formatCode>
                 <c:ptCount val="2"/>
+                <c:formatCode>General</c:formatCode>
                 <c:pt idx="0">
-                  <c:v>596</c:v>
+                  <c:v>153</c:v>
                 </c:pt>
                 <c:pt idx="1">
-                  <c:v>575</c:v>
+                  <c:v>155</c:v>
                 </c:pt>
               </c:numCache>
             </c:numRef>
@@ -196,10 +197,10 @@
               <c:strCache>
                 <c:ptCount val="2"/>
                 <c:pt idx="0">
-                  <c:v>Maio 2026</c:v>
+                  <c:v>Abril 2026</c:v>
                 </c:pt>
                 <c:pt idx="1">
-                  <c:v>Abril 2026</c:v>
+                  <c:v>Maio 2026</c:v>
                 </c:pt>
               </c:strCache>
             </c:strRef>
@@ -210,11 +211,12 @@
               <c:numCache>
                 <c:formatCode>General</c:formatCode>
                 <c:ptCount val="2"/>
+                <c:formatCode>General</c:formatCode>
                 <c:pt idx="0">
-                  <c:v>22</c:v>
+                  <c:v>4</c:v>
                 </c:pt>
                 <c:pt idx="1">
-                  <c:v>2</c:v>
+                  <c:v>5</c:v>
                 </c:pt>
               </c:numCache>
             </c:numRef>
@@ -3708,7 +3710,7 @@
                 </a:solidFill>
                 <a:latin typeface="Calibri"/>
               </a:rPr>
-              <a:t>159</a:t>
+              <a:t>160</a:t>
             </a:r>
           </a:p>
         </p:txBody>
@@ -3823,7 +3825,7 @@
                 </a:solidFill>
                 <a:latin typeface="Calibri"/>
               </a:rPr>
-              <a:t>154</a:t>
+              <a:t>155</a:t>
             </a:r>
           </a:p>
         </p:txBody>
@@ -4053,7 +4055,7 @@
                 </a:solidFill>
                 <a:latin typeface="Calibri"/>
               </a:rPr>
-              <a:t>96.86%</a:t>
+              <a:t>96.88%</a:t>
             </a:r>
           </a:p>
         </p:txBody>
@@ -4226,41 +4228,41 @@
                     <a:p>
                       <a:pPr algn="l"/>
                       <a:r>
-                        <a:t>159</a:t>
-                      </a:r>
-                    </a:p>
-                  </a:txBody>
-                  <a:tcPr>
-                    <a:solidFill>
-                      <a:srgbClr val="FFFFFF"/>
-                    </a:solidFill>
-                  </a:tcPr>
-                </a:tc>
-                <a:tc>
-                  <a:txBody>
-                    <a:bodyPr/>
-                    <a:lstStyle/>
-                    <a:p>
-                      <a:pPr algn="l"/>
-                      <a:r>
-                        <a:t>159</a:t>
-                      </a:r>
-                    </a:p>
-                  </a:txBody>
-                  <a:tcPr>
-                    <a:solidFill>
-                      <a:srgbClr val="FFFFFF"/>
-                    </a:solidFill>
-                  </a:tcPr>
-                </a:tc>
-                <a:tc>
-                  <a:txBody>
-                    <a:bodyPr/>
-                    <a:lstStyle/>
-                    <a:p>
-                      <a:pPr algn="l"/>
-                      <a:r>
-                        <a:t>0</a:t>
+                        <a:t>157</a:t>
+                      </a:r>
+                    </a:p>
+                  </a:txBody>
+                  <a:tcPr>
+                    <a:solidFill>
+                      <a:srgbClr val="FFFFFF"/>
+                    </a:solidFill>
+                  </a:tcPr>
+                </a:tc>
+                <a:tc>
+                  <a:txBody>
+                    <a:bodyPr/>
+                    <a:lstStyle/>
+                    <a:p>
+                      <a:pPr algn="l"/>
+                      <a:r>
+                        <a:t>160</a:t>
+                      </a:r>
+                    </a:p>
+                  </a:txBody>
+                  <a:tcPr>
+                    <a:solidFill>
+                      <a:srgbClr val="FFFFFF"/>
+                    </a:solidFill>
+                  </a:tcPr>
+                </a:tc>
+                <a:tc>
+                  <a:txBody>
+                    <a:bodyPr/>
+                    <a:lstStyle/>
+                    <a:p>
+                      <a:pPr algn="l"/>
+                      <a:r>
+                        <a:t>3</a:t>
                       </a:r>
                     </a:p>
                   </a:txBody>
@@ -4296,41 +4298,41 @@
                     <a:p>
                       <a:pPr algn="l"/>
                       <a:r>
-                        <a:t>148</a:t>
-                      </a:r>
-                    </a:p>
-                  </a:txBody>
-                  <a:tcPr>
-                    <a:solidFill>
-                      <a:srgbClr val="F2F2F2"/>
-                    </a:solidFill>
-                  </a:tcPr>
-                </a:tc>
-                <a:tc>
-                  <a:txBody>
-                    <a:bodyPr/>
-                    <a:lstStyle/>
-                    <a:p>
-                      <a:pPr algn="l"/>
-                      <a:r>
-                        <a:t>154</a:t>
-                      </a:r>
-                    </a:p>
-                  </a:txBody>
-                  <a:tcPr>
-                    <a:solidFill>
-                      <a:srgbClr val="F2F2F2"/>
-                    </a:solidFill>
-                  </a:tcPr>
-                </a:tc>
-                <a:tc>
-                  <a:txBody>
-                    <a:bodyPr/>
-                    <a:lstStyle/>
-                    <a:p>
-                      <a:pPr algn="l"/>
-                      <a:r>
-                        <a:t>+6</a:t>
+                        <a:t>153</a:t>
+                      </a:r>
+                    </a:p>
+                  </a:txBody>
+                  <a:tcPr>
+                    <a:solidFill>
+                      <a:srgbClr val="F2F2F2"/>
+                    </a:solidFill>
+                  </a:tcPr>
+                </a:tc>
+                <a:tc>
+                  <a:txBody>
+                    <a:bodyPr/>
+                    <a:lstStyle/>
+                    <a:p>
+                      <a:pPr algn="l"/>
+                      <a:r>
+                        <a:t>155</a:t>
+                      </a:r>
+                    </a:p>
+                  </a:txBody>
+                  <a:tcPr>
+                    <a:solidFill>
+                      <a:srgbClr val="F2F2F2"/>
+                    </a:solidFill>
+                  </a:tcPr>
+                </a:tc>
+                <a:tc>
+                  <a:txBody>
+                    <a:bodyPr/>
+                    <a:lstStyle/>
+                    <a:p>
+                      <a:pPr algn="l"/>
+                      <a:r>
+                        <a:t>2</a:t>
                       </a:r>
                     </a:p>
                   </a:txBody>
@@ -4366,7 +4368,7 @@
                     <a:p>
                       <a:pPr algn="l"/>
                       <a:r>
-                        <a:t>11</a:t>
+                        <a:t>4</a:t>
                       </a:r>
                     </a:p>
                   </a:txBody>
@@ -4400,7 +4402,7 @@
                     <a:p>
                       <a:pPr algn="l"/>
                       <a:r>
-                        <a:t>-6</a:t>
+                        <a:t>1</a:t>
                       </a:r>
                     </a:p>
                   </a:txBody>
@@ -4436,41 +4438,41 @@
                     <a:p>
                       <a:pPr algn="l"/>
                       <a:r>
-                        <a:t>93.1%</a:t>
-                      </a:r>
-                    </a:p>
-                  </a:txBody>
-                  <a:tcPr>
-                    <a:solidFill>
-                      <a:srgbClr val="F2F2F2"/>
-                    </a:solidFill>
-                  </a:tcPr>
-                </a:tc>
-                <a:tc>
-                  <a:txBody>
-                    <a:bodyPr/>
-                    <a:lstStyle/>
-                    <a:p>
-                      <a:pPr algn="l"/>
-                      <a:r>
-                        <a:t>96.86%</a:t>
-                      </a:r>
-                    </a:p>
-                  </a:txBody>
-                  <a:tcPr>
-                    <a:solidFill>
-                      <a:srgbClr val="F2F2F2"/>
-                    </a:solidFill>
-                  </a:tcPr>
-                </a:tc>
-                <a:tc>
-                  <a:txBody>
-                    <a:bodyPr/>
-                    <a:lstStyle/>
-                    <a:p>
-                      <a:pPr algn="l"/>
-                      <a:r>
-                        <a:t>+3.76pp</a:t>
+                        <a:t>97.45%</a:t>
+                      </a:r>
+                    </a:p>
+                  </a:txBody>
+                  <a:tcPr>
+                    <a:solidFill>
+                      <a:srgbClr val="F2F2F2"/>
+                    </a:solidFill>
+                  </a:tcPr>
+                </a:tc>
+                <a:tc>
+                  <a:txBody>
+                    <a:bodyPr/>
+                    <a:lstStyle/>
+                    <a:p>
+                      <a:pPr algn="l"/>
+                      <a:r>
+                        <a:t>96.88%</a:t>
+                      </a:r>
+                    </a:p>
+                  </a:txBody>
+                  <a:tcPr>
+                    <a:solidFill>
+                      <a:srgbClr val="F2F2F2"/>
+                    </a:solidFill>
+                  </a:tcPr>
+                </a:tc>
+                <a:tc>
+                  <a:txBody>
+                    <a:bodyPr/>
+                    <a:lstStyle/>
+                    <a:p>
+                      <a:pPr algn="l"/>
+                      <a:r>
+                        <a:t>-0.57pp</a:t>
                       </a:r>
                     </a:p>
                   </a:txBody>
@@ -4798,24 +4800,24 @@
                     <a:p>
                       <a:pPr algn="l"/>
                       <a:r>
-                        <a:t>159</a:t>
-                      </a:r>
-                    </a:p>
-                  </a:txBody>
-                  <a:tcPr>
-                    <a:solidFill>
-                      <a:srgbClr val="FFFFFF"/>
-                    </a:solidFill>
-                  </a:tcPr>
-                </a:tc>
-                <a:tc>
-                  <a:txBody>
-                    <a:bodyPr/>
-                    <a:lstStyle/>
-                    <a:p>
-                      <a:pPr algn="l"/>
-                      <a:r>
-                        <a:t>154</a:t>
+                        <a:t>160</a:t>
+                      </a:r>
+                    </a:p>
+                  </a:txBody>
+                  <a:tcPr>
+                    <a:solidFill>
+                      <a:srgbClr val="FFFFFF"/>
+                    </a:solidFill>
+                  </a:tcPr>
+                </a:tc>
+                <a:tc>
+                  <a:txBody>
+                    <a:bodyPr/>
+                    <a:lstStyle/>
+                    <a:p>
+                      <a:pPr algn="l"/>
+                      <a:r>
+                        <a:t>155</a:t>
                       </a:r>
                     </a:p>
                   </a:txBody>
@@ -4849,7 +4851,7 @@
                     <a:p>
                       <a:pPr algn="l"/>
                       <a:r>
-                        <a:t>96.86%</a:t>
+                        <a:t>96.88%</a:t>
                       </a:r>
                     </a:p>
                   </a:txBody>
@@ -4885,58 +4887,58 @@
                     <a:p>
                       <a:pPr algn="l"/>
                       <a:r>
-                        <a:t>159</a:t>
-                      </a:r>
-                    </a:p>
-                  </a:txBody>
-                  <a:tcPr>
-                    <a:solidFill>
-                      <a:srgbClr val="F2F2F2"/>
-                    </a:solidFill>
-                  </a:tcPr>
-                </a:tc>
-                <a:tc>
-                  <a:txBody>
-                    <a:bodyPr/>
-                    <a:lstStyle/>
-                    <a:p>
-                      <a:pPr algn="l"/>
-                      <a:r>
-                        <a:t>148</a:t>
-                      </a:r>
-                    </a:p>
-                  </a:txBody>
-                  <a:tcPr>
-                    <a:solidFill>
-                      <a:srgbClr val="F2F2F2"/>
-                    </a:solidFill>
-                  </a:tcPr>
-                </a:tc>
-                <a:tc>
-                  <a:txBody>
-                    <a:bodyPr/>
-                    <a:lstStyle/>
-                    <a:p>
-                      <a:pPr algn="l"/>
-                      <a:r>
-                        <a:t>11</a:t>
-                      </a:r>
-                    </a:p>
-                  </a:txBody>
-                  <a:tcPr>
-                    <a:solidFill>
-                      <a:srgbClr val="F2F2F2"/>
-                    </a:solidFill>
-                  </a:tcPr>
-                </a:tc>
-                <a:tc>
-                  <a:txBody>
-                    <a:bodyPr/>
-                    <a:lstStyle/>
-                    <a:p>
-                      <a:pPr algn="l"/>
-                      <a:r>
-                        <a:t>93.1%</a:t>
+                        <a:t>157</a:t>
+                      </a:r>
+                    </a:p>
+                  </a:txBody>
+                  <a:tcPr>
+                    <a:solidFill>
+                      <a:srgbClr val="F2F2F2"/>
+                    </a:solidFill>
+                  </a:tcPr>
+                </a:tc>
+                <a:tc>
+                  <a:txBody>
+                    <a:bodyPr/>
+                    <a:lstStyle/>
+                    <a:p>
+                      <a:pPr algn="l"/>
+                      <a:r>
+                        <a:t>153</a:t>
+                      </a:r>
+                    </a:p>
+                  </a:txBody>
+                  <a:tcPr>
+                    <a:solidFill>
+                      <a:srgbClr val="F2F2F2"/>
+                    </a:solidFill>
+                  </a:tcPr>
+                </a:tc>
+                <a:tc>
+                  <a:txBody>
+                    <a:bodyPr/>
+                    <a:lstStyle/>
+                    <a:p>
+                      <a:pPr algn="l"/>
+                      <a:r>
+                        <a:t>4</a:t>
+                      </a:r>
+                    </a:p>
+                  </a:txBody>
+                  <a:tcPr>
+                    <a:solidFill>
+                      <a:srgbClr val="F2F2F2"/>
+                    </a:solidFill>
+                  </a:tcPr>
+                </a:tc>
+                <a:tc>
+                  <a:txBody>
+                    <a:bodyPr/>
+                    <a:lstStyle/>
+                    <a:p>
+                      <a:pPr algn="l"/>
+                      <a:r>
+                        <a:t>97.45%</a:t>
                       </a:r>
                     </a:p>
                   </a:txBody>
@@ -5024,7 +5026,7 @@
                 </a:solidFill>
                 <a:latin typeface="Calibri"/>
               </a:rPr>
-              <a:t>PERFORMANCE: 93.1% → 96.86% - Bom</a:t>
+              <a:t>PERFORMANCE: 97.45% → 96.88% - Regular</a:t>
             </a:r>
           </a:p>
         </p:txBody>
@@ -5307,75 +5309,75 @@
                     <a:p>
                       <a:pPr algn="l"/>
                       <a:r>
-                        <a:t>283376</a:t>
-                      </a:r>
-                    </a:p>
-                  </a:txBody>
-                  <a:tcPr>
-                    <a:solidFill>
-                      <a:srgbClr val="FFFFFF"/>
-                    </a:solidFill>
-                  </a:tcPr>
-                </a:tc>
-                <a:tc>
-                  <a:txBody>
-                    <a:bodyPr/>
-                    <a:lstStyle/>
-                    <a:p>
-                      <a:pPr algn="l"/>
-                      <a:r>
-                        <a:t>YANKE COMERCIO ELETR - RI - RI - RIO CLA</a:t>
-                      </a:r>
-                    </a:p>
-                  </a:txBody>
-                  <a:tcPr>
-                    <a:solidFill>
-                      <a:srgbClr val="FFFFFF"/>
-                    </a:solidFill>
-                  </a:tcPr>
-                </a:tc>
-                <a:tc>
-                  <a:txBody>
-                    <a:bodyPr/>
-                    <a:lstStyle/>
-                    <a:p>
-                      <a:pPr algn="l"/>
-                      <a:r>
-                        <a:t>RIO CLARO/SP</a:t>
-                      </a:r>
-                    </a:p>
-                  </a:txBody>
-                  <a:tcPr>
-                    <a:solidFill>
-                      <a:srgbClr val="FFFFFF"/>
-                    </a:solidFill>
-                  </a:tcPr>
-                </a:tc>
-                <a:tc>
-                  <a:txBody>
-                    <a:bodyPr/>
-                    <a:lstStyle/>
-                    <a:p>
-                      <a:pPr algn="l"/>
-                      <a:r>
-                        <a:t>14/05/2026</a:t>
-                      </a:r>
-                    </a:p>
-                  </a:txBody>
-                  <a:tcPr>
-                    <a:solidFill>
-                      <a:srgbClr val="FFFFFF"/>
-                    </a:solidFill>
-                  </a:tcPr>
-                </a:tc>
-                <a:tc>
-                  <a:txBody>
-                    <a:bodyPr/>
-                    <a:lstStyle/>
-                    <a:p>
-                      <a:pPr algn="l"/>
-                      <a:r>
-                        <a:t>ENTREGUE FORA DO PRAZO</a:t>
+                        <a:t>283335</a:t>
+                      </a:r>
+                    </a:p>
+                  </a:txBody>
+                  <a:tcPr>
+                    <a:solidFill>
+                      <a:srgbClr val="FFFFFF"/>
+                    </a:solidFill>
+                  </a:tcPr>
+                </a:tc>
+                <a:tc>
+                  <a:txBody>
+                    <a:bodyPr/>
+                    <a:lstStyle/>
+                    <a:p>
+                      <a:pPr algn="l"/>
+                      <a:r>
+                        <a:t>PORTOEXPRESS LOGISTI - ITAJAI / SC</a:t>
+                      </a:r>
+                    </a:p>
+                  </a:txBody>
+                  <a:tcPr>
+                    <a:solidFill>
+                      <a:srgbClr val="FFFFFF"/>
+                    </a:solidFill>
+                  </a:tcPr>
+                </a:tc>
+                <a:tc>
+                  <a:txBody>
+                    <a:bodyPr/>
+                    <a:lstStyle/>
+                    <a:p>
+                      <a:pPr algn="l"/>
+                      <a:r>
+                        <a:t>ITAJAI/SC</a:t>
+                      </a:r>
+                    </a:p>
+                  </a:txBody>
+                  <a:tcPr>
+                    <a:solidFill>
+                      <a:srgbClr val="FFFFFF"/>
+                    </a:solidFill>
+                  </a:tcPr>
+                </a:tc>
+                <a:tc>
+                  <a:txBody>
+                    <a:bodyPr/>
+                    <a:lstStyle/>
+                    <a:p>
+                      <a:pPr algn="l"/>
+                      <a:r>
+                        <a:t>20/05/2026</a:t>
+                      </a:r>
+                    </a:p>
+                  </a:txBody>
+                  <a:tcPr>
+                    <a:solidFill>
+                      <a:srgbClr val="FFFFFF"/>
+                    </a:solidFill>
+                  </a:tcPr>
+                </a:tc>
+                <a:tc>
+                  <a:txBody>
+                    <a:bodyPr/>
+                    <a:lstStyle/>
+                    <a:p>
+                      <a:pPr algn="l"/>
+                      <a:r>
+                        <a:t>FORA DO PRAZO</a:t>
                       </a:r>
                     </a:p>
                   </a:txBody>
@@ -5394,58 +5396,58 @@
                     <a:p>
                       <a:pPr algn="l"/>
                       <a:r>
-                        <a:t>283379</a:t>
-                      </a:r>
-                    </a:p>
-                  </a:txBody>
-                  <a:tcPr>
-                    <a:solidFill>
-                      <a:srgbClr val="F2F2F2"/>
-                    </a:solidFill>
-                  </a:tcPr>
-                </a:tc>
-                <a:tc>
-                  <a:txBody>
-                    <a:bodyPr/>
-                    <a:lstStyle/>
-                    <a:p>
-                      <a:pPr algn="l"/>
-                      <a:r>
-                        <a:t>YANKE COMERCIO ELETR - RI - RI - RIO CLA</a:t>
-                      </a:r>
-                    </a:p>
-                  </a:txBody>
-                  <a:tcPr>
-                    <a:solidFill>
-                      <a:srgbClr val="F2F2F2"/>
-                    </a:solidFill>
-                  </a:tcPr>
-                </a:tc>
-                <a:tc>
-                  <a:txBody>
-                    <a:bodyPr/>
-                    <a:lstStyle/>
-                    <a:p>
-                      <a:pPr algn="l"/>
-                      <a:r>
-                        <a:t>RIO CLARO/SP</a:t>
-                      </a:r>
-                    </a:p>
-                  </a:txBody>
-                  <a:tcPr>
-                    <a:solidFill>
-                      <a:srgbClr val="F2F2F2"/>
-                    </a:solidFill>
-                  </a:tcPr>
-                </a:tc>
-                <a:tc>
-                  <a:txBody>
-                    <a:bodyPr/>
-                    <a:lstStyle/>
-                    <a:p>
-                      <a:pPr algn="l"/>
-                      <a:r>
-                        <a:t>14/05/2026</a:t>
+                        <a:t>283706</a:t>
+                      </a:r>
+                    </a:p>
+                  </a:txBody>
+                  <a:tcPr>
+                    <a:solidFill>
+                      <a:srgbClr val="F2F2F2"/>
+                    </a:solidFill>
+                  </a:tcPr>
+                </a:tc>
+                <a:tc>
+                  <a:txBody>
+                    <a:bodyPr/>
+                    <a:lstStyle/>
+                    <a:p>
+                      <a:pPr algn="l"/>
+                      <a:r>
+                        <a:t>PORTOEXPRESS LOGISTI - ITAJAI / SC</a:t>
+                      </a:r>
+                    </a:p>
+                  </a:txBody>
+                  <a:tcPr>
+                    <a:solidFill>
+                      <a:srgbClr val="F2F2F2"/>
+                    </a:solidFill>
+                  </a:tcPr>
+                </a:tc>
+                <a:tc>
+                  <a:txBody>
+                    <a:bodyPr/>
+                    <a:lstStyle/>
+                    <a:p>
+                      <a:pPr algn="l"/>
+                      <a:r>
+                        <a:t>ITAJAI/SC</a:t>
+                      </a:r>
+                    </a:p>
+                  </a:txBody>
+                  <a:tcPr>
+                    <a:solidFill>
+                      <a:srgbClr val="F2F2F2"/>
+                    </a:solidFill>
+                  </a:tcPr>
+                </a:tc>
+                <a:tc>
+                  <a:txBody>
+                    <a:bodyPr/>
+                    <a:lstStyle/>
+                    <a:p>
+                      <a:pPr algn="l"/>
+                      <a:r>
+                        <a:t>22/05/2026</a:t>
                       </a:r>
                     </a:p>
                   </a:txBody>
@@ -5813,58 +5815,58 @@
                     <a:p>
                       <a:pPr algn="l"/>
                       <a:r>
-                        <a:t>121</a:t>
-                      </a:r>
-                    </a:p>
-                  </a:txBody>
-                  <a:tcPr>
-                    <a:solidFill>
-                      <a:srgbClr val="FFFFFF"/>
-                    </a:solidFill>
-                  </a:tcPr>
-                </a:tc>
-                <a:tc>
-                  <a:txBody>
-                    <a:bodyPr/>
-                    <a:lstStyle/>
-                    <a:p>
-                      <a:pPr algn="l"/>
-                      <a:r>
-                        <a:t>4</a:t>
-                      </a:r>
-                    </a:p>
-                  </a:txBody>
-                  <a:tcPr>
-                    <a:solidFill>
-                      <a:srgbClr val="FFFFFF"/>
-                    </a:solidFill>
-                  </a:tcPr>
-                </a:tc>
-                <a:tc>
-                  <a:txBody>
-                    <a:bodyPr/>
-                    <a:lstStyle/>
-                    <a:p>
-                      <a:pPr algn="l"/>
-                      <a:r>
-                        <a:t>96.8%</a:t>
-                      </a:r>
-                    </a:p>
-                  </a:txBody>
-                  <a:tcPr>
-                    <a:solidFill>
-                      <a:srgbClr val="FFFFFF"/>
-                    </a:solidFill>
-                  </a:tcPr>
-                </a:tc>
-                <a:tc>
-                  <a:txBody>
-                    <a:bodyPr/>
-                    <a:lstStyle/>
-                    <a:p>
-                      <a:pPr algn="l"/>
-                      <a:r>
-                        <a:t>Bom</a:t>
+                        <a:t>122</a:t>
+                      </a:r>
+                    </a:p>
+                  </a:txBody>
+                  <a:tcPr>
+                    <a:solidFill>
+                      <a:srgbClr val="FFFFFF"/>
+                    </a:solidFill>
+                  </a:tcPr>
+                </a:tc>
+                <a:tc>
+                  <a:txBody>
+                    <a:bodyPr/>
+                    <a:lstStyle/>
+                    <a:p>
+                      <a:pPr algn="l"/>
+                      <a:r>
+                        <a:t>3</a:t>
+                      </a:r>
+                    </a:p>
+                  </a:txBody>
+                  <a:tcPr>
+                    <a:solidFill>
+                      <a:srgbClr val="FFFFFF"/>
+                    </a:solidFill>
+                  </a:tcPr>
+                </a:tc>
+                <a:tc>
+                  <a:txBody>
+                    <a:bodyPr/>
+                    <a:lstStyle/>
+                    <a:p>
+                      <a:pPr algn="l"/>
+                      <a:r>
+                        <a:t>97.6%</a:t>
+                      </a:r>
+                    </a:p>
+                  </a:txBody>
+                  <a:tcPr>
+                    <a:solidFill>
+                      <a:srgbClr val="FFFFFF"/>
+                    </a:solidFill>
+                  </a:tcPr>
+                </a:tc>
+                <a:tc>
+                  <a:txBody>
+                    <a:bodyPr/>
+                    <a:lstStyle/>
+                    <a:p>
+                      <a:pPr algn="l"/>
+                      <a:r>
+                        <a:t>Regular</a:t>
                       </a:r>
                     </a:p>
                   </a:txBody>
@@ -5917,58 +5919,58 @@
                     <a:p>
                       <a:pPr algn="l"/>
                       <a:r>
-                        <a:t>19</a:t>
-                      </a:r>
-                    </a:p>
-                  </a:txBody>
-                  <a:tcPr>
-                    <a:solidFill>
-                      <a:srgbClr val="F2F2F2"/>
-                    </a:solidFill>
-                  </a:tcPr>
-                </a:tc>
-                <a:tc>
-                  <a:txBody>
-                    <a:bodyPr/>
-                    <a:lstStyle/>
-                    <a:p>
-                      <a:pPr algn="l"/>
-                      <a:r>
-                        <a:t>1</a:t>
-                      </a:r>
-                    </a:p>
-                  </a:txBody>
-                  <a:tcPr>
-                    <a:solidFill>
-                      <a:srgbClr val="F2F2F2"/>
-                    </a:solidFill>
-                  </a:tcPr>
-                </a:tc>
-                <a:tc>
-                  <a:txBody>
-                    <a:bodyPr/>
-                    <a:lstStyle/>
-                    <a:p>
-                      <a:pPr algn="l"/>
-                      <a:r>
-                        <a:t>95.0%</a:t>
-                      </a:r>
-                    </a:p>
-                  </a:txBody>
-                  <a:tcPr>
-                    <a:solidFill>
-                      <a:srgbClr val="F2F2F2"/>
-                    </a:solidFill>
-                  </a:tcPr>
-                </a:tc>
-                <a:tc>
-                  <a:txBody>
-                    <a:bodyPr/>
-                    <a:lstStyle/>
-                    <a:p>
-                      <a:pPr algn="l"/>
-                      <a:r>
-                        <a:t>Bom</a:t>
+                        <a:t>18</a:t>
+                      </a:r>
+                    </a:p>
+                  </a:txBody>
+                  <a:tcPr>
+                    <a:solidFill>
+                      <a:srgbClr val="F2F2F2"/>
+                    </a:solidFill>
+                  </a:tcPr>
+                </a:tc>
+                <a:tc>
+                  <a:txBody>
+                    <a:bodyPr/>
+                    <a:lstStyle/>
+                    <a:p>
+                      <a:pPr algn="l"/>
+                      <a:r>
+                        <a:t>2</a:t>
+                      </a:r>
+                    </a:p>
+                  </a:txBody>
+                  <a:tcPr>
+                    <a:solidFill>
+                      <a:srgbClr val="F2F2F2"/>
+                    </a:solidFill>
+                  </a:tcPr>
+                </a:tc>
+                <a:tc>
+                  <a:txBody>
+                    <a:bodyPr/>
+                    <a:lstStyle/>
+                    <a:p>
+                      <a:pPr algn="l"/>
+                      <a:r>
+                        <a:t>90.0%</a:t>
+                      </a:r>
+                    </a:p>
+                  </a:txBody>
+                  <a:tcPr>
+                    <a:solidFill>
+                      <a:srgbClr val="F2F2F2"/>
+                    </a:solidFill>
+                  </a:tcPr>
+                </a:tc>
+                <a:tc>
+                  <a:txBody>
+                    <a:bodyPr/>
+                    <a:lstStyle/>
+                    <a:p>
+                      <a:pPr algn="l"/>
+                      <a:r>
+                        <a:t>Regular</a:t>
                       </a:r>
                     </a:p>
                   </a:txBody>
@@ -6108,24 +6110,24 @@
                     <a:p>
                       <a:pPr algn="l"/>
                       <a:r>
-                        <a:t>2</a:t>
-                      </a:r>
-                    </a:p>
-                  </a:txBody>
-                  <a:tcPr>
-                    <a:solidFill>
-                      <a:srgbClr val="F2F2F2"/>
-                    </a:solidFill>
-                  </a:tcPr>
-                </a:tc>
-                <a:tc>
-                  <a:txBody>
-                    <a:bodyPr/>
-                    <a:lstStyle/>
-                    <a:p>
-                      <a:pPr algn="l"/>
-                      <a:r>
-                        <a:t>2</a:t>
+                        <a:t>3</a:t>
+                      </a:r>
+                    </a:p>
+                  </a:txBody>
+                  <a:tcPr>
+                    <a:solidFill>
+                      <a:srgbClr val="F2F2F2"/>
+                    </a:solidFill>
+                  </a:tcPr>
+                </a:tc>
+                <a:tc>
+                  <a:txBody>
+                    <a:bodyPr/>
+                    <a:lstStyle/>
+                    <a:p>
+                      <a:pPr algn="l"/>
+                      <a:r>
+                        <a:t>3</a:t>
                       </a:r>
                     </a:p>
                   </a:txBody>
@@ -6895,7 +6897,7 @@
                 </a:solidFill>
                 <a:latin typeface="Calibri"/>
               </a:rPr>
-              <a:t>TOP DESTINATARIOS (97 pontos)</a:t>
+              <a:t>TOP DESTINATARIOS (116 pontos)</a:t>
             </a:r>
           </a:p>
         </p:txBody>
@@ -7158,7 +7160,7 @@
                     <a:p>
                       <a:pPr algn="l"/>
                       <a:r>
-                        <a:t>PORTOEXPRESS LOGISTI - IT - ITAJAI / SC</a:t>
+                        <a:t>PORTOEXPRESS LOGISTI - ITAJAI / SC</a:t>
                       </a:r>
                     </a:p>
                   </a:txBody>
@@ -7192,58 +7194,58 @@
                     <a:p>
                       <a:pPr algn="l"/>
                       <a:r>
-                        <a:t>13</a:t>
-                      </a:r>
-                    </a:p>
-                  </a:txBody>
-                  <a:tcPr>
-                    <a:solidFill>
-                      <a:srgbClr val="FFFFFF"/>
-                    </a:solidFill>
-                  </a:tcPr>
-                </a:tc>
-                <a:tc>
-                  <a:txBody>
-                    <a:bodyPr/>
-                    <a:lstStyle/>
-                    <a:p>
-                      <a:pPr algn="l"/>
-                      <a:r>
-                        <a:t>1</a:t>
-                      </a:r>
-                    </a:p>
-                  </a:txBody>
-                  <a:tcPr>
-                    <a:solidFill>
-                      <a:srgbClr val="FFFFFF"/>
-                    </a:solidFill>
-                  </a:tcPr>
-                </a:tc>
-                <a:tc>
-                  <a:txBody>
-                    <a:bodyPr/>
-                    <a:lstStyle/>
-                    <a:p>
-                      <a:pPr algn="l"/>
-                      <a:r>
-                        <a:t>92.9%</a:t>
-                      </a:r>
-                    </a:p>
-                  </a:txBody>
-                  <a:tcPr>
-                    <a:solidFill>
-                      <a:srgbClr val="FFFFFF"/>
-                    </a:solidFill>
-                  </a:tcPr>
-                </a:tc>
-                <a:tc>
-                  <a:txBody>
-                    <a:bodyPr/>
-                    <a:lstStyle/>
-                    <a:p>
-                      <a:pPr algn="l"/>
-                      <a:r>
-                        <a:t>Regular</a:t>
+                        <a:t>12</a:t>
+                      </a:r>
+                    </a:p>
+                  </a:txBody>
+                  <a:tcPr>
+                    <a:solidFill>
+                      <a:srgbClr val="FFFFFF"/>
+                    </a:solidFill>
+                  </a:tcPr>
+                </a:tc>
+                <a:tc>
+                  <a:txBody>
+                    <a:bodyPr/>
+                    <a:lstStyle/>
+                    <a:p>
+                      <a:pPr algn="l"/>
+                      <a:r>
+                        <a:t>2</a:t>
+                      </a:r>
+                    </a:p>
+                  </a:txBody>
+                  <a:tcPr>
+                    <a:solidFill>
+                      <a:srgbClr val="FFFFFF"/>
+                    </a:solidFill>
+                  </a:tcPr>
+                </a:tc>
+                <a:tc>
+                  <a:txBody>
+                    <a:bodyPr/>
+                    <a:lstStyle/>
+                    <a:p>
+                      <a:pPr algn="l"/>
+                      <a:r>
+                        <a:t>85.71%</a:t>
+                      </a:r>
+                    </a:p>
+                  </a:txBody>
+                  <a:tcPr>
+                    <a:solidFill>
+                      <a:srgbClr val="FFFFFF"/>
+                    </a:solidFill>
+                  </a:tcPr>
+                </a:tc>
+                <a:tc>
+                  <a:txBody>
+                    <a:bodyPr/>
+                    <a:lstStyle/>
+                    <a:p>
+                      <a:pPr algn="l"/>
+                      <a:r>
+                        <a:t>Crítico</a:t>
                       </a:r>
                     </a:p>
                   </a:txBody>
@@ -7279,7 +7281,7 @@
                     <a:p>
                       <a:pPr algn="l"/>
                       <a:r>
-                        <a:t>PORTOEXPRESS LOGISTI - SA - SAO PAULO / </a:t>
+                        <a:t>PORTOEXPRESS LOGISTI - SAO PAULO / SP</a:t>
                       </a:r>
                     </a:p>
                   </a:txBody>
@@ -7400,7 +7402,7 @@
                     <a:p>
                       <a:pPr algn="l"/>
                       <a:r>
-                        <a:t>BRAFT DO BRASIL IMPO - GU - GUARULHOS / </a:t>
+                        <a:t>BRAFT DO BRASIL IMPO - GUARULHOS / SP</a:t>
                       </a:r>
                     </a:p>
                   </a:txBody>
@@ -7521,7 +7523,7 @@
                     <a:p>
                       <a:pPr algn="l"/>
                       <a:r>
-                        <a:t>KUKA PRODUTOS INFANT - SA - SAO PAULO / </a:t>
+                        <a:t>KUKA PRODUTOS INFANT - SAO PAULO / SP</a:t>
                       </a:r>
                     </a:p>
                   </a:txBody>
@@ -7642,7 +7644,7 @@
                     <a:p>
                       <a:pPr algn="l"/>
                       <a:r>
-                        <a:t>YANKE COMERCIO ELETR - RI - RIO CLARO / </a:t>
+                        <a:t>YANKE COMERCIO ELETR - RIO CLARO / SP</a:t>
                       </a:r>
                     </a:p>
                   </a:txBody>
@@ -7676,58 +7678,58 @@
                     <a:p>
                       <a:pPr algn="l"/>
                       <a:r>
-                        <a:t>2</a:t>
-                      </a:r>
-                    </a:p>
-                  </a:txBody>
-                  <a:tcPr>
-                    <a:solidFill>
-                      <a:srgbClr val="FFFFFF"/>
-                    </a:solidFill>
-                  </a:tcPr>
-                </a:tc>
-                <a:tc>
-                  <a:txBody>
-                    <a:bodyPr/>
-                    <a:lstStyle/>
-                    <a:p>
-                      <a:pPr algn="l"/>
-                      <a:r>
-                        <a:t>2</a:t>
-                      </a:r>
-                    </a:p>
-                  </a:txBody>
-                  <a:tcPr>
-                    <a:solidFill>
-                      <a:srgbClr val="FFFFFF"/>
-                    </a:solidFill>
-                  </a:tcPr>
-                </a:tc>
-                <a:tc>
-                  <a:txBody>
-                    <a:bodyPr/>
-                    <a:lstStyle/>
-                    <a:p>
-                      <a:pPr algn="l"/>
-                      <a:r>
-                        <a:t>50.0%</a:t>
-                      </a:r>
-                    </a:p>
-                  </a:txBody>
-                  <a:tcPr>
-                    <a:solidFill>
-                      <a:srgbClr val="FFFFFF"/>
-                    </a:solidFill>
-                  </a:tcPr>
-                </a:tc>
-                <a:tc>
-                  <a:txBody>
-                    <a:bodyPr/>
-                    <a:lstStyle/>
-                    <a:p>
-                      <a:pPr algn="l"/>
-                      <a:r>
-                        <a:t>Crítico</a:t>
+                        <a:t>4</a:t>
+                      </a:r>
+                    </a:p>
+                  </a:txBody>
+                  <a:tcPr>
+                    <a:solidFill>
+                      <a:srgbClr val="FFFFFF"/>
+                    </a:solidFill>
+                  </a:tcPr>
+                </a:tc>
+                <a:tc>
+                  <a:txBody>
+                    <a:bodyPr/>
+                    <a:lstStyle/>
+                    <a:p>
+                      <a:pPr algn="l"/>
+                      <a:r>
+                        <a:t>0</a:t>
+                      </a:r>
+                    </a:p>
+                  </a:txBody>
+                  <a:tcPr>
+                    <a:solidFill>
+                      <a:srgbClr val="FFFFFF"/>
+                    </a:solidFill>
+                  </a:tcPr>
+                </a:tc>
+                <a:tc>
+                  <a:txBody>
+                    <a:bodyPr/>
+                    <a:lstStyle/>
+                    <a:p>
+                      <a:pPr algn="l"/>
+                      <a:r>
+                        <a:t>100.0%</a:t>
+                      </a:r>
+                    </a:p>
+                  </a:txBody>
+                  <a:tcPr>
+                    <a:solidFill>
+                      <a:srgbClr val="FFFFFF"/>
+                    </a:solidFill>
+                  </a:tcPr>
+                </a:tc>
+                <a:tc>
+                  <a:txBody>
+                    <a:bodyPr/>
+                    <a:lstStyle/>
+                    <a:p>
+                      <a:pPr algn="l"/>
+                      <a:r>
+                        <a:t>Excelente</a:t>
                       </a:r>
                     </a:p>
                   </a:txBody>
@@ -7763,7 +7765,7 @@
                     <a:p>
                       <a:pPr algn="l"/>
                       <a:r>
-                        <a:t>ANDRA S A ELECTRIC S - CA - CAJAMAR / SP</a:t>
+                        <a:t>ANDRA S A ELECTRIC S - CAJAMAR / SP</a:t>
                       </a:r>
                     </a:p>
                   </a:txBody>
@@ -7884,7 +7886,7 @@
                     <a:p>
                       <a:pPr algn="l"/>
                       <a:r>
-                        <a:t>NAMASTE SERVICOS LTD - SA - SAO PAULO / </a:t>
+                        <a:t>NAMASTE SERVICOS LTD - SAO PAULO / SP</a:t>
                       </a:r>
                     </a:p>
                   </a:txBody>
@@ -8005,7 +8007,7 @@
                     <a:p>
                       <a:pPr algn="l"/>
                       <a:r>
-                        <a:t>TERMACO LOGISTICA - GUARU - GUARULHOS / </a:t>
+                        <a:t>TERMACO LOGISTICA - GUARULHOS / SP</a:t>
                       </a:r>
                     </a:p>
                   </a:txBody>
@@ -8126,7 +8128,7 @@
                     <a:p>
                       <a:pPr algn="l"/>
                       <a:r>
-                        <a:t>GIRO CERTO CARGAS E - GUA - GUARULHOS / </a:t>
+                        <a:t>CHRISTIAN SIEGL - LAURO DE FREITAS / BA</a:t>
                       </a:r>
                     </a:p>
                   </a:txBody>
@@ -8247,7 +8249,7 @@
                     <a:p>
                       <a:pPr algn="l"/>
                       <a:r>
-                        <a:t>RI HAPPY BRINQUEDOS - CUI - CUIABA / MT</a:t>
+                        <a:t>GIRO CERTO CARGAS E - GUARULHOS / SP</a:t>
                       </a:r>
                     </a:p>
                   </a:txBody>
@@ -8368,7 +8370,7 @@
                     <a:p>
                       <a:pPr algn="l"/>
                       <a:r>
-                        <a:t>RAFAEL PAULISTA DE C - OS - OSASCO / SP</a:t>
+                        <a:t>RI HAPPY BRINQUEDOS - CUIABA / MT</a:t>
                       </a:r>
                     </a:p>
                   </a:txBody>
@@ -8489,7 +8491,7 @@
                     <a:p>
                       <a:pPr algn="l"/>
                       <a:r>
-                        <a:t>BMB MATERIAL DE CONS - SA - SAO PAULO / </a:t>
+                        <a:t>RAFAEL PAULISTA DE C - OSASCO / SP</a:t>
                       </a:r>
                     </a:p>
                   </a:txBody>
@@ -8610,7 +8612,7 @@
                     <a:p>
                       <a:pPr algn="l"/>
                       <a:r>
-                        <a:t>NSNA SOCIOAMBIENTAL - SAO - SAO PAULO / </a:t>
+                        <a:t>BMB MATERIAL DE CONS - SAO PAULO / SP</a:t>
                       </a:r>
                     </a:p>
                   </a:txBody>
@@ -8731,7 +8733,7 @@
                     <a:p>
                       <a:pPr algn="l"/>
                       <a:r>
-                        <a:t>TIAGO TAVARES DE ALM - SA - SAO PAULO / </a:t>
+                        <a:t>NSNA SOCIOAMBIENTAL - SAO PAULO / SP</a:t>
                       </a:r>
                     </a:p>
                   </a:txBody>
@@ -9247,66 +9249,6 @@
           </a:p>
         </p:txBody>
       </p:sp>
-      <p:sp useBgFill="1">
-        <p:nvSpPr>
-          <p:cNvPr id="29" name="Rectangle 22">
-            <a:extLst>
-              <a:ext uri="{FF2B5EF4-FFF2-40B4-BE49-F238E27FC236}">
-                <a16:creationId xmlns:a16="http://schemas.microsoft.com/office/drawing/2014/main" id="{F0087D53-9295-4463-AAE4-D5C626046E9F}"/>
-              </a:ext>
-              <a:ext uri="{C183D7F6-B498-43B3-948B-1728B52AA6E4}">
-                <adec:decorative xmlns:adec="http://schemas.microsoft.com/office/drawing/2017/decorative" val="1"/>
-              </a:ext>
-            </a:extLst>
-          </p:cNvPr>
-          <p:cNvSpPr>
-            <a:spLocks noGrp="1" noRot="1" noChangeAspect="1" noMove="1" noResize="1" noEditPoints="1" noAdjustHandles="1" noChangeArrowheads="1" noChangeShapeType="1" noTextEdit="1"/>
-          </p:cNvSpPr>
-          <p:nvPr>
-            <p:extLst>
-              <p:ext uri="{386F3935-93C4-4BCD-93E2-E3B085C9AB24}">
-                <p16:designElem xmlns:p16="http://schemas.microsoft.com/office/powerpoint/2015/main" val="1"/>
-              </p:ext>
-            </p:extLst>
-          </p:nvPr>
-        </p:nvSpPr>
-        <p:spPr>
-          <a:xfrm>
-            <a:off x="0" y="0"/>
-            <a:ext cx="12188952" cy="6858000"/>
-          </a:xfrm>
-          <a:prstGeom prst="rect">
-            <a:avLst/>
-          </a:prstGeom>
-          <a:ln>
-            <a:noFill/>
-          </a:ln>
-        </p:spPr>
-        <p:style>
-          <a:lnRef idx="2">
-            <a:schemeClr val="accent1">
-              <a:shade val="50000"/>
-            </a:schemeClr>
-          </a:lnRef>
-          <a:fillRef idx="1">
-            <a:schemeClr val="accent1"/>
-          </a:fillRef>
-          <a:effectRef idx="0">
-            <a:schemeClr val="accent1"/>
-          </a:effectRef>
-          <a:fontRef idx="minor">
-            <a:schemeClr val="lt1"/>
-          </a:fontRef>
-        </p:style>
-        <p:txBody>
-          <a:bodyPr rtlCol="0" anchor="ctr"/>
-          <a:lstStyle/>
-          <a:p>
-            <a:pPr algn="ctr"/>
-            <a:endParaRPr lang="en-US"/>
-          </a:p>
-        </p:txBody>
-      </p:sp>
     </p:spTree>
   </p:cSld>
   <p:clrMapOvr>
